--- a/week05_secretkey/lecture/chapter03_hashing.pptx
+++ b/week05_secretkey/lecture/chapter03_hashing.pptx
@@ -2691,7 +2691,7 @@
           </a:ln>
           <a:extLst>
             <a:ext uri="{C572A759-6A51-4108-AA02-DFA0A04FC94B}">
-              <ma14:wrappingTextBoxFlag xmlns="" xmlns:m="http://schemas.openxmlformats.org/officeDocument/2006/math" xmlns:a14="http://schemas.microsoft.com/office/drawing/2010/main" xmlns:ma14="http://schemas.microsoft.com/office/mac/drawingml/2011/main" val="1"/>
+              <ma14:wrappingTextBoxFlag xmlns:ma14="http://schemas.microsoft.com/office/mac/drawingml/2011/main" xmlns:a14="http://schemas.microsoft.com/office/drawing/2010/main" xmlns:m="http://schemas.openxmlformats.org/officeDocument/2006/math" xmlns="" val="1"/>
             </a:ext>
           </a:extLst>
         </p:spPr>
@@ -2730,7 +2730,7 @@
           </a:ln>
           <a:extLst>
             <a:ext uri="{C572A759-6A51-4108-AA02-DFA0A04FC94B}">
-              <ma14:wrappingTextBoxFlag xmlns="" xmlns:m="http://schemas.openxmlformats.org/officeDocument/2006/math" xmlns:a14="http://schemas.microsoft.com/office/drawing/2010/main" xmlns:ma14="http://schemas.microsoft.com/office/mac/drawingml/2011/main" val="1"/>
+              <ma14:wrappingTextBoxFlag xmlns:ma14="http://schemas.microsoft.com/office/mac/drawingml/2011/main" xmlns:a14="http://schemas.microsoft.com/office/drawing/2010/main" xmlns:m="http://schemas.openxmlformats.org/officeDocument/2006/math" xmlns="" val="1"/>
             </a:ext>
           </a:extLst>
         </p:spPr>
@@ -3831,42 +3831,6 @@
           </a:prstGeom>
         </p:spPr>
       </p:pic>
-      <p:pic>
-        <p:nvPicPr>
-          <p:cNvPr id="2" name="Picture 1" descr="A screenshot of a computer&#10;&#10;AI-generated content may be incorrect.">
-            <a:extLst>
-              <a:ext uri="{FF2B5EF4-FFF2-40B4-BE49-F238E27FC236}">
-                <a16:creationId xmlns:a16="http://schemas.microsoft.com/office/drawing/2014/main" id="{C1BF830F-9AB2-6CC2-7FF0-90366A2E7F77}"/>
-              </a:ext>
-            </a:extLst>
-          </p:cNvPr>
-          <p:cNvPicPr>
-            <a:picLocks noChangeAspect="1"/>
-          </p:cNvPicPr>
-          <p:nvPr/>
-        </p:nvPicPr>
-        <p:blipFill>
-          <a:blip r:embed="rId3">
-            <a:extLst>
-              <a:ext uri="{28A0092B-C50C-407E-A947-70E740481C1C}">
-                <a14:useLocalDpi xmlns:a14="http://schemas.microsoft.com/office/drawing/2010/main" val="0"/>
-              </a:ext>
-            </a:extLst>
-          </a:blip>
-          <a:stretch>
-            <a:fillRect/>
-          </a:stretch>
-        </p:blipFill>
-        <p:spPr>
-          <a:xfrm>
-            <a:off x="3510326" y="44450"/>
-            <a:ext cx="5648469" cy="5715000"/>
-          </a:xfrm>
-          <a:prstGeom prst="rect">
-            <a:avLst/>
-          </a:prstGeom>
-        </p:spPr>
-      </p:pic>
     </p:spTree>
     <p:extLst>
       <p:ext uri="{BB962C8B-B14F-4D97-AF65-F5344CB8AC3E}">
@@ -3878,218 +3842,6 @@
     <a:masterClrMapping/>
   </p:clrMapOvr>
   <p:transition spd="med"/>
-  <p:timing>
-    <p:tnLst>
-      <p:par>
-        <p:cTn id="1" dur="indefinite" restart="never" nodeType="tmRoot">
-          <p:childTnLst>
-            <p:seq concurrent="1" nextAc="seek">
-              <p:cTn id="2" dur="indefinite" nodeType="mainSeq">
-                <p:childTnLst>
-                  <p:par>
-                    <p:cTn id="3" fill="hold">
-                      <p:stCondLst>
-                        <p:cond delay="indefinite"/>
-                      </p:stCondLst>
-                      <p:childTnLst>
-                        <p:par>
-                          <p:cTn id="4" fill="hold">
-                            <p:stCondLst>
-                              <p:cond delay="0"/>
-                            </p:stCondLst>
-                            <p:childTnLst>
-                              <p:par>
-                                <p:cTn id="5" presetID="2" presetClass="entr" presetSubtype="4" fill="hold" nodeType="clickEffect">
-                                  <p:stCondLst>
-                                    <p:cond delay="0"/>
-                                  </p:stCondLst>
-                                  <p:childTnLst>
-                                    <p:set>
-                                      <p:cBhvr>
-                                        <p:cTn id="6" dur="1" fill="hold">
-                                          <p:stCondLst>
-                                            <p:cond delay="0"/>
-                                          </p:stCondLst>
-                                        </p:cTn>
-                                        <p:tgtEl>
-                                          <p:spTgt spid="2"/>
-                                        </p:tgtEl>
-                                        <p:attrNameLst>
-                                          <p:attrName>style.visibility</p:attrName>
-                                        </p:attrNameLst>
-                                      </p:cBhvr>
-                                      <p:to>
-                                        <p:strVal val="visible"/>
-                                      </p:to>
-                                    </p:set>
-                                    <p:anim calcmode="lin" valueType="num">
-                                      <p:cBhvr additive="base">
-                                        <p:cTn id="7" dur="500" fill="hold"/>
-                                        <p:tgtEl>
-                                          <p:spTgt spid="2"/>
-                                        </p:tgtEl>
-                                        <p:attrNameLst>
-                                          <p:attrName>ppt_x</p:attrName>
-                                        </p:attrNameLst>
-                                      </p:cBhvr>
-                                      <p:tavLst>
-                                        <p:tav tm="0">
-                                          <p:val>
-                                            <p:strVal val="#ppt_x"/>
-                                          </p:val>
-                                        </p:tav>
-                                        <p:tav tm="100000">
-                                          <p:val>
-                                            <p:strVal val="#ppt_x"/>
-                                          </p:val>
-                                        </p:tav>
-                                      </p:tavLst>
-                                    </p:anim>
-                                    <p:anim calcmode="lin" valueType="num">
-                                      <p:cBhvr additive="base">
-                                        <p:cTn id="8" dur="500" fill="hold"/>
-                                        <p:tgtEl>
-                                          <p:spTgt spid="2"/>
-                                        </p:tgtEl>
-                                        <p:attrNameLst>
-                                          <p:attrName>ppt_y</p:attrName>
-                                        </p:attrNameLst>
-                                      </p:cBhvr>
-                                      <p:tavLst>
-                                        <p:tav tm="0">
-                                          <p:val>
-                                            <p:strVal val="1+#ppt_h/2"/>
-                                          </p:val>
-                                        </p:tav>
-                                        <p:tav tm="100000">
-                                          <p:val>
-                                            <p:strVal val="#ppt_y"/>
-                                          </p:val>
-                                        </p:tav>
-                                      </p:tavLst>
-                                    </p:anim>
-                                  </p:childTnLst>
-                                </p:cTn>
-                              </p:par>
-                            </p:childTnLst>
-                          </p:cTn>
-                        </p:par>
-                      </p:childTnLst>
-                    </p:cTn>
-                  </p:par>
-                  <p:par>
-                    <p:cTn id="9" fill="hold">
-                      <p:stCondLst>
-                        <p:cond delay="indefinite"/>
-                      </p:stCondLst>
-                      <p:childTnLst>
-                        <p:par>
-                          <p:cTn id="10" fill="hold">
-                            <p:stCondLst>
-                              <p:cond delay="0"/>
-                            </p:stCondLst>
-                            <p:childTnLst>
-                              <p:par>
-                                <p:cTn id="11" presetID="2" presetClass="entr" presetSubtype="4" fill="hold" nodeType="clickEffect">
-                                  <p:stCondLst>
-                                    <p:cond delay="0"/>
-                                  </p:stCondLst>
-                                  <p:childTnLst>
-                                    <p:set>
-                                      <p:cBhvr>
-                                        <p:cTn id="12" dur="1" fill="hold">
-                                          <p:stCondLst>
-                                            <p:cond delay="0"/>
-                                          </p:stCondLst>
-                                        </p:cTn>
-                                        <p:tgtEl>
-                                          <p:spTgt spid="2"/>
-                                        </p:tgtEl>
-                                        <p:attrNameLst>
-                                          <p:attrName>style.visibility</p:attrName>
-                                        </p:attrNameLst>
-                                      </p:cBhvr>
-                                      <p:to>
-                                        <p:strVal val="visible"/>
-                                      </p:to>
-                                    </p:set>
-                                    <p:anim calcmode="lin" valueType="num">
-                                      <p:cBhvr additive="base">
-                                        <p:cTn id="13" dur="500" fill="hold"/>
-                                        <p:tgtEl>
-                                          <p:spTgt spid="2"/>
-                                        </p:tgtEl>
-                                        <p:attrNameLst>
-                                          <p:attrName>ppt_x</p:attrName>
-                                        </p:attrNameLst>
-                                      </p:cBhvr>
-                                      <p:tavLst>
-                                        <p:tav tm="0">
-                                          <p:val>
-                                            <p:strVal val="#ppt_x"/>
-                                          </p:val>
-                                        </p:tav>
-                                        <p:tav tm="100000">
-                                          <p:val>
-                                            <p:strVal val="#ppt_x"/>
-                                          </p:val>
-                                        </p:tav>
-                                      </p:tavLst>
-                                    </p:anim>
-                                    <p:anim calcmode="lin" valueType="num">
-                                      <p:cBhvr additive="base">
-                                        <p:cTn id="14" dur="500" fill="hold"/>
-                                        <p:tgtEl>
-                                          <p:spTgt spid="2"/>
-                                        </p:tgtEl>
-                                        <p:attrNameLst>
-                                          <p:attrName>ppt_y</p:attrName>
-                                        </p:attrNameLst>
-                                      </p:cBhvr>
-                                      <p:tavLst>
-                                        <p:tav tm="0">
-                                          <p:val>
-                                            <p:strVal val="1+#ppt_h/2"/>
-                                          </p:val>
-                                        </p:tav>
-                                        <p:tav tm="100000">
-                                          <p:val>
-                                            <p:strVal val="#ppt_y"/>
-                                          </p:val>
-                                        </p:tav>
-                                      </p:tavLst>
-                                    </p:anim>
-                                  </p:childTnLst>
-                                </p:cTn>
-                              </p:par>
-                            </p:childTnLst>
-                          </p:cTn>
-                        </p:par>
-                      </p:childTnLst>
-                    </p:cTn>
-                  </p:par>
-                </p:childTnLst>
-              </p:cTn>
-              <p:prevCondLst>
-                <p:cond evt="onPrev" delay="0">
-                  <p:tgtEl>
-                    <p:sldTgt/>
-                  </p:tgtEl>
-                </p:cond>
-              </p:prevCondLst>
-              <p:nextCondLst>
-                <p:cond evt="onNext" delay="0">
-                  <p:tgtEl>
-                    <p:sldTgt/>
-                  </p:tgtEl>
-                </p:cond>
-              </p:nextCondLst>
-            </p:seq>
-          </p:childTnLst>
-        </p:cTn>
-      </p:par>
-    </p:tnLst>
-  </p:timing>
 </p:sld>
 </file>
 
@@ -4244,7 +3996,7 @@
           </a:ln>
           <a:extLst>
             <a:ext uri="{C572A759-6A51-4108-AA02-DFA0A04FC94B}">
-              <ma14:wrappingTextBoxFlag xmlns="" xmlns:ma14="http://schemas.microsoft.com/office/mac/drawingml/2011/main" val="1"/>
+              <ma14:wrappingTextBoxFlag xmlns:ma14="http://schemas.microsoft.com/office/mac/drawingml/2011/main" xmlns="" val="1"/>
             </a:ext>
           </a:extLst>
         </p:spPr>
@@ -4681,7 +4433,7 @@
           </a:ln>
           <a:extLst>
             <a:ext uri="{C572A759-6A51-4108-AA02-DFA0A04FC94B}">
-              <ma14:wrappingTextBoxFlag xmlns="" xmlns:ma14="http://schemas.microsoft.com/office/mac/drawingml/2011/main" val="1"/>
+              <ma14:wrappingTextBoxFlag xmlns:ma14="http://schemas.microsoft.com/office/mac/drawingml/2011/main" xmlns="" val="1"/>
             </a:ext>
           </a:extLst>
         </p:spPr>
@@ -5128,7 +4880,7 @@
           </a:ln>
           <a:extLst>
             <a:ext uri="{C572A759-6A51-4108-AA02-DFA0A04FC94B}">
-              <ma14:wrappingTextBoxFlag xmlns="" xmlns:ma14="http://schemas.microsoft.com/office/mac/drawingml/2011/main" val="1"/>
+              <ma14:wrappingTextBoxFlag xmlns:ma14="http://schemas.microsoft.com/office/mac/drawingml/2011/main" xmlns="" val="1"/>
             </a:ext>
           </a:extLst>
         </p:spPr>
@@ -5602,7 +5354,7 @@
           </a:ln>
           <a:extLst>
             <a:ext uri="{C572A759-6A51-4108-AA02-DFA0A04FC94B}">
-              <ma14:wrappingTextBoxFlag xmlns="" xmlns:ma14="http://schemas.microsoft.com/office/mac/drawingml/2011/main" val="1"/>
+              <ma14:wrappingTextBoxFlag xmlns:ma14="http://schemas.microsoft.com/office/mac/drawingml/2011/main" xmlns="" val="1"/>
             </a:ext>
           </a:extLst>
         </p:spPr>
@@ -6060,7 +5812,7 @@
           </a:ln>
           <a:extLst>
             <a:ext uri="{C572A759-6A51-4108-AA02-DFA0A04FC94B}">
-              <ma14:wrappingTextBoxFlag xmlns="" xmlns:ma14="http://schemas.microsoft.com/office/mac/drawingml/2011/main" val="1"/>
+              <ma14:wrappingTextBoxFlag xmlns:ma14="http://schemas.microsoft.com/office/mac/drawingml/2011/main" xmlns="" val="1"/>
             </a:ext>
           </a:extLst>
         </p:spPr>
@@ -6507,7 +6259,7 @@
           </a:ln>
           <a:extLst>
             <a:ext uri="{C572A759-6A51-4108-AA02-DFA0A04FC94B}">
-              <ma14:wrappingTextBoxFlag xmlns="" xmlns:ma14="http://schemas.microsoft.com/office/mac/drawingml/2011/main" val="1"/>
+              <ma14:wrappingTextBoxFlag xmlns:ma14="http://schemas.microsoft.com/office/mac/drawingml/2011/main" xmlns="" val="1"/>
             </a:ext>
           </a:extLst>
         </p:spPr>
@@ -6954,7 +6706,7 @@
           </a:ln>
           <a:extLst>
             <a:ext uri="{C572A759-6A51-4108-AA02-DFA0A04FC94B}">
-              <ma14:wrappingTextBoxFlag xmlns="" xmlns:ma14="http://schemas.microsoft.com/office/mac/drawingml/2011/main" val="1"/>
+              <ma14:wrappingTextBoxFlag xmlns:ma14="http://schemas.microsoft.com/office/mac/drawingml/2011/main" xmlns="" val="1"/>
             </a:ext>
           </a:extLst>
         </p:spPr>
@@ -7693,7 +7445,7 @@
         <p14:prism isInverted="1"/>
       </p:transition>
     </mc:Choice>
-    <mc:Fallback xmlns="" xmlns:m="http://schemas.openxmlformats.org/officeDocument/2006/math" xmlns:a14="http://schemas.microsoft.com/office/drawing/2010/main">
+    <mc:Fallback xmlns:a14="http://schemas.microsoft.com/office/drawing/2010/main" xmlns:m="http://schemas.openxmlformats.org/officeDocument/2006/math" xmlns="">
       <p:transition spd="slow">
         <p:fade/>
       </p:transition>
@@ -8112,7 +7864,7 @@
           </a:ln>
           <a:extLst>
             <a:ext uri="{C572A759-6A51-4108-AA02-DFA0A04FC94B}">
-              <ma14:wrappingTextBoxFlag xmlns="" xmlns:m="http://schemas.openxmlformats.org/officeDocument/2006/math" xmlns:a14="http://schemas.microsoft.com/office/drawing/2010/main" xmlns:ma14="http://schemas.microsoft.com/office/mac/drawingml/2011/main" val="1"/>
+              <ma14:wrappingTextBoxFlag xmlns:ma14="http://schemas.microsoft.com/office/mac/drawingml/2011/main" xmlns:a14="http://schemas.microsoft.com/office/drawing/2010/main" xmlns:m="http://schemas.openxmlformats.org/officeDocument/2006/math" xmlns="" val="1"/>
             </a:ext>
           </a:extLst>
         </p:spPr>
@@ -8211,7 +7963,7 @@
           </a:ln>
           <a:extLst>
             <a:ext uri="{C572A759-6A51-4108-AA02-DFA0A04FC94B}">
-              <ma14:wrappingTextBoxFlag xmlns="" xmlns:m="http://schemas.openxmlformats.org/officeDocument/2006/math" xmlns:a14="http://schemas.microsoft.com/office/drawing/2010/main" xmlns:ma14="http://schemas.microsoft.com/office/mac/drawingml/2011/main" val="1"/>
+              <ma14:wrappingTextBoxFlag xmlns:ma14="http://schemas.microsoft.com/office/mac/drawingml/2011/main" xmlns:a14="http://schemas.microsoft.com/office/drawing/2010/main" xmlns:m="http://schemas.openxmlformats.org/officeDocument/2006/math" xmlns="" val="1"/>
             </a:ext>
           </a:extLst>
         </p:spPr>
@@ -8475,7 +8227,7 @@
             <a:effectLst/>
             <a:extLst>
               <a:ext uri="{C572A759-6A51-4108-AA02-DFA0A04FC94B}">
-                <ma14:wrappingTextBoxFlag xmlns:ma14="http://schemas.microsoft.com/office/mac/drawingml/2011/main" xmlns:a14="http://schemas.microsoft.com/office/drawing/2010/main" xmlns:m="http://schemas.openxmlformats.org/officeDocument/2006/math" xmlns="" val="1"/>
+                <ma14:wrappingTextBoxFlag xmlns="" xmlns:m="http://schemas.openxmlformats.org/officeDocument/2006/math" xmlns:a14="http://schemas.microsoft.com/office/drawing/2010/main" xmlns:ma14="http://schemas.microsoft.com/office/mac/drawingml/2011/main" val="1"/>
               </a:ext>
             </a:extLst>
           </p:spPr>
@@ -8520,7 +8272,7 @@
           </a:ln>
           <a:extLst>
             <a:ext uri="{C572A759-6A51-4108-AA02-DFA0A04FC94B}">
-              <ma14:wrappingTextBoxFlag xmlns:ma14="http://schemas.microsoft.com/office/mac/drawingml/2011/main" xmlns:a14="http://schemas.microsoft.com/office/drawing/2010/main" xmlns:m="http://schemas.openxmlformats.org/officeDocument/2006/math" xmlns="" val="1"/>
+              <ma14:wrappingTextBoxFlag xmlns="" xmlns:m="http://schemas.openxmlformats.org/officeDocument/2006/math" xmlns:a14="http://schemas.microsoft.com/office/drawing/2010/main" xmlns:ma14="http://schemas.microsoft.com/office/mac/drawingml/2011/main" val="1"/>
             </a:ext>
           </a:extLst>
         </p:spPr>
@@ -8873,7 +8625,7 @@
           </a:ln>
           <a:extLst>
             <a:ext uri="{C572A759-6A51-4108-AA02-DFA0A04FC94B}">
-              <ma14:wrappingTextBoxFlag xmlns:ma14="http://schemas.microsoft.com/office/mac/drawingml/2011/main" xmlns:a14="http://schemas.microsoft.com/office/drawing/2010/main" xmlns:m="http://schemas.openxmlformats.org/officeDocument/2006/math" xmlns="" val="1"/>
+              <ma14:wrappingTextBoxFlag xmlns="" xmlns:m="http://schemas.openxmlformats.org/officeDocument/2006/math" xmlns:a14="http://schemas.microsoft.com/office/drawing/2010/main" xmlns:ma14="http://schemas.microsoft.com/office/mac/drawingml/2011/main" val="1"/>
             </a:ext>
           </a:extLst>
         </p:spPr>
@@ -8977,7 +8729,7 @@
           </a:ln>
           <a:extLst>
             <a:ext uri="{C572A759-6A51-4108-AA02-DFA0A04FC94B}">
-              <ma14:wrappingTextBoxFlag xmlns:ma14="http://schemas.microsoft.com/office/mac/drawingml/2011/main" xmlns:a14="http://schemas.microsoft.com/office/drawing/2010/main" xmlns:m="http://schemas.openxmlformats.org/officeDocument/2006/math" xmlns="" val="1"/>
+              <ma14:wrappingTextBoxFlag xmlns="" xmlns:m="http://schemas.openxmlformats.org/officeDocument/2006/math" xmlns:a14="http://schemas.microsoft.com/office/drawing/2010/main" xmlns:ma14="http://schemas.microsoft.com/office/mac/drawingml/2011/main" val="1"/>
             </a:ext>
           </a:extLst>
         </p:spPr>
@@ -9689,7 +9441,7 @@
           </a:ln>
           <a:extLst>
             <a:ext uri="{C572A759-6A51-4108-AA02-DFA0A04FC94B}">
-              <ma14:wrappingTextBoxFlag xmlns="" xmlns:m="http://schemas.openxmlformats.org/officeDocument/2006/math" xmlns:a14="http://schemas.microsoft.com/office/drawing/2010/main" xmlns:ma14="http://schemas.microsoft.com/office/mac/drawingml/2011/main" val="1"/>
+              <ma14:wrappingTextBoxFlag xmlns:ma14="http://schemas.microsoft.com/office/mac/drawingml/2011/main" xmlns:a14="http://schemas.microsoft.com/office/drawing/2010/main" xmlns:m="http://schemas.openxmlformats.org/officeDocument/2006/math" xmlns="" val="1"/>
             </a:ext>
           </a:extLst>
         </p:spPr>
@@ -9791,7 +9543,7 @@
           </a:ln>
           <a:extLst>
             <a:ext uri="{C572A759-6A51-4108-AA02-DFA0A04FC94B}">
-              <ma14:wrappingTextBoxFlag xmlns="" xmlns:m="http://schemas.openxmlformats.org/officeDocument/2006/math" xmlns:a14="http://schemas.microsoft.com/office/drawing/2010/main" xmlns:ma14="http://schemas.microsoft.com/office/mac/drawingml/2011/main" val="1"/>
+              <ma14:wrappingTextBoxFlag xmlns:ma14="http://schemas.microsoft.com/office/mac/drawingml/2011/main" xmlns:a14="http://schemas.microsoft.com/office/drawing/2010/main" xmlns:m="http://schemas.openxmlformats.org/officeDocument/2006/math" xmlns="" val="1"/>
             </a:ext>
           </a:extLst>
         </p:spPr>
@@ -10140,7 +9892,7 @@
         <p14:prism isInverted="1"/>
       </p:transition>
     </mc:Choice>
-    <mc:Fallback xmlns="" xmlns:m="http://schemas.openxmlformats.org/officeDocument/2006/math" xmlns:a14="http://schemas.microsoft.com/office/drawing/2010/main">
+    <mc:Fallback xmlns:a14="http://schemas.microsoft.com/office/drawing/2010/main" xmlns:m="http://schemas.openxmlformats.org/officeDocument/2006/math" xmlns="">
       <p:transition spd="slow">
         <p:fade/>
       </p:transition>
@@ -10311,7 +10063,7 @@
             <a:effectLst/>
             <a:extLst>
               <a:ext uri="{C572A759-6A51-4108-AA02-DFA0A04FC94B}">
-                <ma14:wrappingTextBoxFlag xmlns="" xmlns:m="http://schemas.openxmlformats.org/officeDocument/2006/math" xmlns:a14="http://schemas.microsoft.com/office/drawing/2010/main" xmlns:ma14="http://schemas.microsoft.com/office/mac/drawingml/2011/main" val="1"/>
+                <ma14:wrappingTextBoxFlag xmlns:ma14="http://schemas.microsoft.com/office/mac/drawingml/2011/main" xmlns:a14="http://schemas.microsoft.com/office/drawing/2010/main" xmlns:m="http://schemas.openxmlformats.org/officeDocument/2006/math" xmlns="" val="1"/>
               </a:ext>
             </a:extLst>
           </p:spPr>
@@ -10355,7 +10107,7 @@
           </a:ln>
           <a:extLst>
             <a:ext uri="{C572A759-6A51-4108-AA02-DFA0A04FC94B}">
-              <ma14:wrappingTextBoxFlag xmlns="" xmlns:m="http://schemas.openxmlformats.org/officeDocument/2006/math" xmlns:a14="http://schemas.microsoft.com/office/drawing/2010/main" xmlns:ma14="http://schemas.microsoft.com/office/mac/drawingml/2011/main" val="1"/>
+              <ma14:wrappingTextBoxFlag xmlns:ma14="http://schemas.microsoft.com/office/mac/drawingml/2011/main" xmlns:a14="http://schemas.microsoft.com/office/drawing/2010/main" xmlns:m="http://schemas.openxmlformats.org/officeDocument/2006/math" xmlns="" val="1"/>
             </a:ext>
           </a:extLst>
         </p:spPr>
@@ -10872,7 +10624,7 @@
           </a:ln>
           <a:extLst>
             <a:ext uri="{C572A759-6A51-4108-AA02-DFA0A04FC94B}">
-              <ma14:wrappingTextBoxFlag xmlns="" xmlns:ma14="http://schemas.microsoft.com/office/mac/drawingml/2011/main" val="1"/>
+              <ma14:wrappingTextBoxFlag xmlns:ma14="http://schemas.microsoft.com/office/mac/drawingml/2011/main" xmlns="" val="1"/>
             </a:ext>
           </a:extLst>
         </p:spPr>
@@ -12575,7 +12327,7 @@
           </a:ln>
           <a:extLst>
             <a:ext uri="{C572A759-6A51-4108-AA02-DFA0A04FC94B}">
-              <ma14:wrappingTextBoxFlag xmlns="" xmlns:ma14="http://schemas.microsoft.com/office/mac/drawingml/2011/main" val="1"/>
+              <ma14:wrappingTextBoxFlag xmlns:ma14="http://schemas.microsoft.com/office/mac/drawingml/2011/main" xmlns="" val="1"/>
             </a:ext>
           </a:extLst>
         </p:spPr>
@@ -13004,7 +12756,7 @@
           </a:ln>
           <a:extLst>
             <a:ext uri="{C572A759-6A51-4108-AA02-DFA0A04FC94B}">
-              <ma14:wrappingTextBoxFlag xmlns="" xmlns:ma14="http://schemas.microsoft.com/office/mac/drawingml/2011/main" val="1"/>
+              <ma14:wrappingTextBoxFlag xmlns:ma14="http://schemas.microsoft.com/office/mac/drawingml/2011/main" xmlns="" val="1"/>
             </a:ext>
           </a:extLst>
         </p:spPr>
@@ -13527,7 +13279,7 @@
           </a:ln>
           <a:extLst>
             <a:ext uri="{C572A759-6A51-4108-AA02-DFA0A04FC94B}">
-              <ma14:wrappingTextBoxFlag xmlns="" xmlns:ma14="http://schemas.microsoft.com/office/mac/drawingml/2011/main" val="1"/>
+              <ma14:wrappingTextBoxFlag xmlns:ma14="http://schemas.microsoft.com/office/mac/drawingml/2011/main" xmlns="" val="1"/>
             </a:ext>
           </a:extLst>
         </p:spPr>
